--- a/slides/01-tour-the-app.pptx
+++ b/slides/01-tour-the-app.pptx
@@ -2769,7 +2769,7 @@
         </p:nvSpPr>
         <p:spPr>
           <a:xfrm>
-            <a:off x="711101" y="1279773"/>
+            <a:off x="711101" y="1645533"/>
             <a:ext cx="5570169" cy="209550"/>
           </a:xfrm>
           <a:prstGeom prst="rect">
@@ -2808,7 +2808,7 @@
         </p:nvSpPr>
         <p:spPr>
           <a:xfrm>
-            <a:off x="711101" y="1590824"/>
+            <a:off x="711101" y="1956584"/>
             <a:ext cx="5570169" cy="1168301"/>
           </a:xfrm>
           <a:prstGeom prst="rect">
@@ -2853,7 +2853,7 @@
         </p:nvSpPr>
         <p:spPr>
           <a:xfrm>
-            <a:off x="711101" y="2962275"/>
+            <a:off x="711101" y="3328035"/>
             <a:ext cx="609600" cy="63401"/>
           </a:xfrm>
           <a:prstGeom prst="roundRect">
@@ -2874,48 +2874,6 @@
               <a:buNone/>
             </a:pPr>
             <a:endParaRPr lang="en-US" dirty="0"/>
-          </a:p>
-        </p:txBody>
-      </p:sp>
-      <p:sp>
-        <p:nvSpPr>
-          <p:cNvPr id="12" name="Text 8"/>
-          <p:cNvSpPr/>
-          <p:nvPr/>
-        </p:nvSpPr>
-        <p:spPr>
-          <a:xfrm>
-            <a:off x="711101" y="3228826"/>
-            <a:ext cx="5570169" cy="634901"/>
-          </a:xfrm>
-          <a:prstGeom prst="rect">
-            <a:avLst/>
-          </a:prstGeom>
-          <a:noFill/>
-          <a:ln/>
-        </p:spPr>
-        <p:txBody>
-          <a:bodyPr wrap="square" lIns="0" tIns="0" rIns="0" bIns="0" rtlCol="0" anchor="t"/>
-          <a:lstStyle/>
-          <a:p>
-            <a:pPr algn="l" indent="0" marL="0">
-              <a:lnSpc>
-                <a:spcPts val="2500"/>
-              </a:lnSpc>
-              <a:buNone/>
-            </a:pPr>
-            <a:r>
-              <a:rPr lang="en-US" sz="1900" dirty="0">
-                <a:solidFill>
-                  <a:srgbClr val="59636E"/>
-                </a:solidFill>
-                <a:latin typeface="Arial" pitchFamily="34" charset="0"/>
-                <a:ea typeface="Arial" pitchFamily="34" charset="-122"/>
-                <a:cs typeface="Arial" pitchFamily="34" charset="-120"/>
-              </a:rPr>
-              <a:t>Pick the session type, mode, and model that fit the task in front of you.</a:t>
-            </a:r>
-            <a:endParaRPr lang="en-US" sz="1900" dirty="0"/>
           </a:p>
         </p:txBody>
       </p:sp>
@@ -7062,7 +7020,7 @@
                 <ns1:ea typeface="Arial" pitchFamily="34" charset="-122"/>
                 <ns1:cs typeface="Arial" pitchFamily="34" charset="-120"/>
               </ns1:rPr>
-              <ns1:t>Fusion: Standard, High, Max. Autopilot is a mode.</ns1:t>
+              <ns1:t>Fusion effort levels: Standard, High, Max.</ns1:t>
             </ns1:r>
             <ns1:pPr algn="l" indent="0" marL="0">
               <ns1:lnSpc>
@@ -7070,51 +7028,18 @@
               </ns1:lnSpc>
               <ns1:buNone/>
             </ns1:pPr>
-            <ns1:r>
-              <ns1:rPr lang="en-US" sz="1450" dirty="0">
-                <ns1:solidFill>
-                  <ns1:srgbClr val="1F2328"/>
-                </ns1:solidFill>
-                <ns1:latin typeface="Arial" pitchFamily="34" charset="0"/>
-                <ns1:ea typeface="Arial" pitchFamily="34" charset="-122"/>
-                <ns1:cs typeface="Arial" pitchFamily="34" charset="-120"/>
-              </ns1:rPr>
-              <ns1:t/>
-            </ns1:r>
             <ns1:pPr algn="l" indent="0" marL="0">
               <ns1:lnSpc>
                 <ns1:spcPts val="1760"/>
               </ns1:lnSpc>
               <ns1:buNone/>
             </ns1:pPr>
-            <ns1:r>
-              <ns1:rPr lang="en-US" sz="1450" b="1" dirty="0">
-                <ns1:solidFill>
-                  <ns1:srgbClr val="1F2328"/>
-                </ns1:solidFill>
-                <ns1:latin typeface="Arial" pitchFamily="34" charset="0"/>
-                <ns1:ea typeface="Arial" pitchFamily="34" charset="-122"/>
-                <ns1:cs typeface="Arial" pitchFamily="34" charset="-120"/>
-              </ns1:rPr>
-              <ns1:t/>
-            </ns1:r>
             <ns1:pPr algn="l" indent="0" marL="0">
               <ns1:lnSpc>
                 <ns1:spcPts val="1760"/>
               </ns1:lnSpc>
               <ns1:buNone/>
             </ns1:pPr>
-            <ns1:r>
-              <ns1:rPr lang="en-US" sz="1450" dirty="0">
-                <ns1:solidFill>
-                  <ns1:srgbClr val="1F2328"/>
-                </ns1:solidFill>
-                <ns1:latin typeface="Arial" pitchFamily="34" charset="0"/>
-                <ns1:ea typeface="Arial" pitchFamily="34" charset="-122"/>
-                <ns1:cs typeface="Arial" pitchFamily="34" charset="-120"/>
-              </ns1:rPr>
-              <ns1:t/>
-            </ns1:r>
             <ns1:endParaRPr lang="en-US" sz="1450" dirty="0"/>
           </ns1:p>
         </ns0:txBody>
@@ -8984,7 +8909,7 @@
                 <ns1:ea typeface="Arial" pitchFamily="34" charset="-122"/>
                 <ns1:cs typeface="Arial" pitchFamily="34" charset="-120"/>
               </ns1:rPr>
-              <ns1:t>Views: New, Pull requests, Issues, Dashboards, Automations, Customize, and Sessions.</ns1:t>
+              <ns1:t>The sidebar puts your GitHub work and app tools in one place.</ns1:t>
             </ns1:r>
             <ns1:endParaRPr lang="en-US" sz="1450" dirty="0"/>
           </ns1:p>
@@ -10800,7 +10725,7 @@
         </p:nvSpPr>
         <p:spPr>
           <a:xfrm>
-            <a:off x="711101" y="1413123"/>
+            <a:off x="711101" y="1778883"/>
             <a:ext cx="5570169" cy="209550"/>
           </a:xfrm>
           <a:prstGeom prst="rect">
@@ -10839,7 +10764,7 @@
         </p:nvSpPr>
         <p:spPr>
           <a:xfrm>
-            <a:off x="711101" y="1724174"/>
+            <a:off x="711101" y="2089934"/>
             <a:ext cx="5570169" cy="584150"/>
           </a:xfrm>
           <a:prstGeom prst="rect">
@@ -10884,7 +10809,7 @@
         </p:nvSpPr>
         <p:spPr>
           <a:xfrm>
-            <a:off x="711101" y="2511475"/>
+            <a:off x="711101" y="2877235"/>
             <a:ext cx="609600" cy="63401"/>
           </a:xfrm>
           <a:prstGeom prst="roundRect">
@@ -10905,48 +10830,6 @@
               <a:buNone/>
             </a:pPr>
             <a:endParaRPr lang="en-US" dirty="0"/>
-          </a:p>
-        </p:txBody>
-      </p:sp>
-      <p:sp>
-        <p:nvSpPr>
-          <p:cNvPr id="12" name="Text 8"/>
-          <p:cNvSpPr/>
-          <p:nvPr/>
-        </p:nvSpPr>
-        <p:spPr>
-          <a:xfrm>
-            <a:off x="711101" y="2778026"/>
-            <a:ext cx="5570169" cy="952351"/>
-          </a:xfrm>
-          <a:prstGeom prst="rect">
-            <a:avLst/>
-          </a:prstGeom>
-          <a:noFill/>
-          <a:ln/>
-        </p:spPr>
-        <p:txBody>
-          <a:bodyPr wrap="square" lIns="0" tIns="0" rIns="0" bIns="0" rtlCol="0" anchor="t"/>
-          <a:lstStyle/>
-          <a:p>
-            <a:pPr algn="l" indent="0" marL="0">
-              <a:lnSpc>
-                <a:spcPts val="2500"/>
-              </a:lnSpc>
-              <a:buNone/>
-            </a:pPr>
-            <a:r>
-              <a:rPr lang="en-US" sz="1900" dirty="0">
-                <a:solidFill>
-                  <a:srgbClr val="59636E"/>
-                </a:solidFill>
-                <a:latin typeface="Arial" pitchFamily="34" charset="0"/>
-                <a:ea typeface="Arial" pitchFamily="34" charset="-122"/>
-                <a:cs typeface="Arial" pitchFamily="34" charset="-120"/>
-              </a:rPr>
-              <a:t>Copilot already works next to your code. The app solves a different problem: supervising agent work end to end.</a:t>
-            </a:r>
-            <a:endParaRPr lang="en-US" sz="1900" dirty="0"/>
           </a:p>
         </p:txBody>
       </p:sp>
@@ -13039,7 +12922,7 @@
         </p:nvSpPr>
         <p:spPr>
           <a:xfrm>
-            <a:off x="711101" y="1571774"/>
+            <a:off x="711101" y="1937534"/>
             <a:ext cx="5570169" cy="209550"/>
           </a:xfrm>
           <a:prstGeom prst="rect">
@@ -13078,7 +12961,7 @@
         </p:nvSpPr>
         <p:spPr>
           <a:xfrm>
-            <a:off x="711101" y="1882825"/>
+            <a:off x="711101" y="2248585"/>
             <a:ext cx="5570169" cy="584150"/>
           </a:xfrm>
           <a:prstGeom prst="rect">
@@ -13123,7 +13006,7 @@
         </p:nvSpPr>
         <p:spPr>
           <a:xfrm>
-            <a:off x="711101" y="2670125"/>
+            <a:off x="711101" y="3035885"/>
             <a:ext cx="609600" cy="63401"/>
           </a:xfrm>
           <a:prstGeom prst="roundRect">
@@ -13144,48 +13027,6 @@
               <a:buNone/>
             </a:pPr>
             <a:endParaRPr lang="en-US" dirty="0"/>
-          </a:p>
-        </p:txBody>
-      </p:sp>
-      <p:sp>
-        <p:nvSpPr>
-          <p:cNvPr id="12" name="Text 8"/>
-          <p:cNvSpPr/>
-          <p:nvPr/>
-        </p:nvSpPr>
-        <p:spPr>
-          <a:xfrm>
-            <a:off x="711101" y="2936677"/>
-            <a:ext cx="5570169" cy="634901"/>
-          </a:xfrm>
-          <a:prstGeom prst="rect">
-            <a:avLst/>
-          </a:prstGeom>
-          <a:noFill/>
-          <a:ln/>
-        </p:spPr>
-        <p:txBody>
-          <a:bodyPr wrap="square" lIns="0" tIns="0" rIns="0" bIns="0" rtlCol="0" anchor="t"/>
-          <a:lstStyle/>
-          <a:p>
-            <a:pPr algn="l" indent="0" marL="0">
-              <a:lnSpc>
-                <a:spcPts val="2500"/>
-              </a:lnSpc>
-              <a:buNone/>
-            </a:pPr>
-            <a:r>
-              <a:rPr lang="en-US" sz="1900" dirty="0">
-                <a:solidFill>
-                  <a:srgbClr val="59636E"/>
-                </a:solidFill>
-                <a:latin typeface="Arial" pitchFamily="34" charset="0"/>
-                <a:ea typeface="Arial" pitchFamily="34" charset="-122"/>
-                <a:cs typeface="Arial" pitchFamily="34" charset="-120"/>
-              </a:rPr>
-              <a:t>Learn where you start work, find GitHub items, save repeat tasks, and extend the app.</a:t>
-            </a:r>
-            <a:endParaRPr lang="en-US" sz="1900" dirty="0"/>
           </a:p>
         </p:txBody>
       </p:sp>
@@ -14065,7 +13906,7 @@
                 <ns1:ea typeface="Arial" pitchFamily="34" charset="-122"/>
                 <ns1:cs typeface="Arial" pitchFamily="34" charset="-120"/>
               </ns1:rPr>
-              <ns1:t>Tasks can run on a schedule or event.</ns1:t>
+              <ns1:t>Recurring agent tasks.</ns1:t>
             </ns1:r>
             <ns1:endParaRPr lang="en-US" sz="1350" dirty="0"/>
           </ns1:p>
@@ -15241,8 +15082,8 @@
         </ns0:nvSpPr>
         <ns0:spPr>
           <ns1:xfrm>
-            <ns1:off x="511076" y="1659880"/>
-            <ns1:ext cx="7105650" cy="1421011"/>
+            <ns1:off x="512064" y="1325880"/>
+            <ns1:ext cx="8165592" cy="1965960"/>
           </ns1:xfrm>
           <ns1:prstGeom prst="roundRect">
             <ns1:avLst>
@@ -15278,7 +15119,7 @@
       </ns0:sp>
       <ns0:pic>
         <ns0:nvPicPr>
-          <ns0:cNvPr id="9" name="Image 2" descr="Automations view"/>
+          <ns0:cNvPr id="9" name="Image 2" descr="Automations view template cards, such as Issue triage, Changelog draft, and Repo audit, each labeled Daily, Weekly, or Manual"/>
           <ns0:cNvPicPr>
             <ns1:picLocks noChangeAspect="1"/>
           </ns0:cNvPicPr>
@@ -15292,8 +15133,8 @@
         </ns0:blipFill>
         <ns0:spPr>
           <ns1:xfrm>
-            <ns1:off x="558701" y="1707505"/>
-            <ns1:ext cx="7010400" cy="1325761"/>
+            <ns1:off x="557784" y="1371600"/>
+            <ns1:ext cx="8074152" cy="1874520"/>
           </ns1:xfrm>
           <ns1:prstGeom prst="rect">
             <ns1:avLst/>

--- a/slides/01-tour-the-app.pptx
+++ b/slides/01-tour-the-app.pptx
@@ -5611,8 +5611,8 @@
         </p:nvSpPr>
         <p:spPr>
           <a:xfrm>
-            <a:off x="511076" y="1569690"/>
-            <a:ext cx="3549551" cy="2397621"/>
+            <a:off x="2194560" y="1161288"/>
+            <a:ext cx="4754880" cy="3200400"/>
           </a:xfrm>
           <a:prstGeom prst="roundRect">
             <a:avLst>
@@ -5662,8 +5662,8 @@
         </p:blipFill>
         <p:spPr>
           <a:xfrm>
-            <a:off x="558701" y="1617315"/>
-            <a:ext cx="3454301" cy="2302371"/>
+            <a:off x="2240280" y="1207008"/>
+            <a:ext cx="4663440" cy="3108960"/>
           </a:xfrm>
           <a:prstGeom prst="rect">
             <a:avLst/>
@@ -5672,560 +5672,14 @@
       </p:pic>
       <p:sp>
         <p:nvSpPr>
-          <p:cNvPr id="10" name="Text 5"/>
-          <p:cNvSpPr/>
-          <p:nvPr/>
-        </p:nvSpPr>
-        <p:spPr>
-          <a:xfrm>
-            <a:off x="4317802" y="1244501"/>
-            <a:ext cx="4318099" cy="898773"/>
-          </a:xfrm>
-          <a:prstGeom prst="roundRect">
-            <a:avLst>
-              <a:gd name="adj" fmla="val 14130"/>
-            </a:avLst>
-          </a:prstGeom>
-          <a:solidFill>
-            <a:srgbClr val="FFFFFF"/>
-          </a:solidFill>
-          <a:ln w="9525">
-            <a:solidFill>
-              <a:srgbClr val="9CD7FF"/>
-            </a:solidFill>
-          </a:ln>
-        </p:spPr>
-        <p:txBody>
-          <a:bodyPr wrap="square" rtlCol="0" anchor="ctr"/>
-          <a:lstStyle/>
-          <a:p>
-            <a:pPr indent="0" marL="0">
-              <a:buNone/>
-            </a:pPr>
-            <a:endParaRPr lang="en-US" dirty="0"/>
-          </a:p>
-        </p:txBody>
-      </p:sp>
-      <p:sp>
-        <p:nvSpPr>
-          <p:cNvPr id="11" name="Text 6"/>
-          <p:cNvSpPr/>
-          <p:nvPr/>
-        </p:nvSpPr>
-        <p:spPr>
-          <a:xfrm>
-            <a:off x="4428827" y="1355527"/>
-            <a:ext cx="381000" cy="381000"/>
-          </a:xfrm>
-          <a:prstGeom prst="roundRect">
-            <a:avLst>
-              <a:gd name="adj" fmla="val 23333"/>
-            </a:avLst>
-          </a:prstGeom>
-          <a:solidFill>
-            <a:srgbClr val="DDF4FF"/>
-          </a:solidFill>
-          <a:ln/>
-        </p:spPr>
-        <p:txBody>
-          <a:bodyPr wrap="square" rtlCol="0" anchor="ctr"/>
-          <a:lstStyle/>
-          <a:p>
-            <a:pPr indent="0" marL="0">
-              <a:buNone/>
-            </a:pPr>
-            <a:endParaRPr lang="en-US" dirty="0"/>
-          </a:p>
-        </p:txBody>
-      </p:sp>
-      <p:pic>
-        <p:nvPicPr>
-          <p:cNvPr id="12" name="Image 3" descr="">
-            <a:extLst>
-              <a:ext uri="{C183D7F6-B498-43B3-948B-1728B52AA6E4}">
-                <adec:decorative xmlns:adec="http://schemas.microsoft.com/office/drawing/2017/decorative" val="1"/>
-              </a:ext>
-            </a:extLst>
-          </p:cNvPr>
-          <p:cNvPicPr>
-            <a:picLocks noChangeAspect="1"/>
-          </p:cNvPicPr>
-          <p:nvPr/>
-        </p:nvPicPr>
-        <p:blipFill>
-          <a:blip r:embed="rId5"/>
-          <a:stretch>
-            <a:fillRect/>
-          </a:stretch>
-        </p:blipFill>
-        <p:spPr>
-          <a:xfrm>
-            <a:off x="4511427" y="1438126"/>
-            <a:ext cx="215801" cy="215801"/>
-          </a:xfrm>
-          <a:prstGeom prst="rect">
-            <a:avLst/>
-          </a:prstGeom>
-        </p:spPr>
-      </p:pic>
-      <p:sp>
-        <p:nvSpPr>
-          <p:cNvPr id="13" name="Text 7"/>
-          <p:cNvSpPr/>
-          <p:nvPr/>
-        </p:nvSpPr>
-        <p:spPr>
-          <a:xfrm>
-            <a:off x="4924127" y="1431727"/>
-            <a:ext cx="1069312" cy="228600"/>
-          </a:xfrm>
-          <a:prstGeom prst="rect">
-            <a:avLst/>
-          </a:prstGeom>
-          <a:noFill/>
-          <a:ln/>
-        </p:spPr>
-        <p:txBody>
-          <a:bodyPr wrap="square" lIns="0" tIns="0" rIns="0" bIns="0" rtlCol="0" anchor="t"/>
-          <a:lstStyle/>
-          <a:p>
-            <a:pPr algn="l" indent="0" marL="0">
-              <a:lnSpc>
-                <a:spcPts val="1800"/>
-              </a:lnSpc>
-              <a:buNone/>
-            </a:pPr>
-            <a:r>
-              <a:rPr lang="en-US" sz="1650" b="1" dirty="0">
-                <a:solidFill>
-                  <a:srgbClr val="1F2328"/>
-                </a:solidFill>
-                <a:latin typeface="Arial" pitchFamily="34" charset="0"/>
-                <a:ea typeface="Arial" pitchFamily="34" charset="-122"/>
-                <a:cs typeface="Arial" pitchFamily="34" charset="-120"/>
-              </a:rPr>
-              <a:t>Interactive</a:t>
-            </a:r>
-            <a:endParaRPr lang="en-US" sz="1650" dirty="0"/>
-          </a:p>
-        </p:txBody>
-      </p:sp>
-      <p:sp>
-        <p:nvSpPr>
-          <p:cNvPr id="14" name="Text 8"/>
-          <p:cNvSpPr/>
-          <p:nvPr/>
-        </p:nvSpPr>
-        <p:spPr>
-          <a:xfrm>
-            <a:off x="4428827" y="1761827"/>
-            <a:ext cx="4177969" cy="214610"/>
-          </a:xfrm>
-          <a:prstGeom prst="rect">
-            <a:avLst/>
-          </a:prstGeom>
-          <a:noFill/>
-          <a:ln/>
-        </p:spPr>
-        <p:txBody>
-          <a:bodyPr wrap="square" lIns="0" tIns="0" rIns="0" bIns="0" rtlCol="0" anchor="t"/>
-          <a:lstStyle/>
-          <a:p>
-            <a:pPr algn="l" indent="0" marL="0">
-              <a:lnSpc>
-                <a:spcPts val="1690"/>
-              </a:lnSpc>
-              <a:buNone/>
-            </a:pPr>
-            <a:r>
-              <a:rPr lang="en-US" sz="1400" dirty="0">
-                <a:solidFill>
-                  <a:srgbClr val="59636E"/>
-                </a:solidFill>
-                <a:latin typeface="Arial" pitchFamily="34" charset="0"/>
-                <a:ea typeface="Arial" pitchFamily="34" charset="-122"/>
-                <a:cs typeface="Arial" pitchFamily="34" charset="-120"/>
-              </a:rPr>
-              <a:t>Stay involved at every step.</a:t>
-            </a:r>
-            <a:endParaRPr lang="en-US" sz="1400" dirty="0"/>
-          </a:p>
-        </p:txBody>
-      </p:sp>
-      <p:sp>
-        <p:nvSpPr>
-          <p:cNvPr id="15" name="Text 9"/>
-          <p:cNvSpPr/>
-          <p:nvPr/>
-        </p:nvSpPr>
-        <p:spPr>
-          <a:xfrm>
-            <a:off x="4317802" y="2219474"/>
-            <a:ext cx="4318099" cy="898773"/>
-          </a:xfrm>
-          <a:prstGeom prst="roundRect">
-            <a:avLst>
-              <a:gd name="adj" fmla="val 14130"/>
-            </a:avLst>
-          </a:prstGeom>
-          <a:solidFill>
-            <a:srgbClr val="FFFFFF"/>
-          </a:solidFill>
-          <a:ln w="9525">
-            <a:solidFill>
-              <a:srgbClr val="E0C5FF"/>
-            </a:solidFill>
-          </a:ln>
-        </p:spPr>
-        <p:txBody>
-          <a:bodyPr wrap="square" rtlCol="0" anchor="ctr"/>
-          <a:lstStyle/>
-          <a:p>
-            <a:pPr indent="0" marL="0">
-              <a:buNone/>
-            </a:pPr>
-            <a:endParaRPr lang="en-US" dirty="0"/>
-          </a:p>
-        </p:txBody>
-      </p:sp>
-      <p:sp>
-        <p:nvSpPr>
-          <p:cNvPr id="16" name="Text 10"/>
-          <p:cNvSpPr/>
-          <p:nvPr/>
-        </p:nvSpPr>
-        <p:spPr>
-          <a:xfrm>
-            <a:off x="4428827" y="2330500"/>
-            <a:ext cx="381000" cy="381000"/>
-          </a:xfrm>
-          <a:prstGeom prst="roundRect">
-            <a:avLst>
-              <a:gd name="adj" fmla="val 23333"/>
-            </a:avLst>
-          </a:prstGeom>
-          <a:solidFill>
-            <a:srgbClr val="FBEFFF"/>
-          </a:solidFill>
-          <a:ln/>
-        </p:spPr>
-        <p:txBody>
-          <a:bodyPr wrap="square" rtlCol="0" anchor="ctr"/>
-          <a:lstStyle/>
-          <a:p>
-            <a:pPr indent="0" marL="0">
-              <a:buNone/>
-            </a:pPr>
-            <a:endParaRPr lang="en-US" dirty="0"/>
-          </a:p>
-        </p:txBody>
-      </p:sp>
-      <p:pic>
-        <p:nvPicPr>
-          <p:cNvPr id="17" name="Image 4" descr="">
-            <a:extLst>
-              <a:ext uri="{C183D7F6-B498-43B3-948B-1728B52AA6E4}">
-                <adec:decorative xmlns:adec="http://schemas.microsoft.com/office/drawing/2017/decorative" val="1"/>
-              </a:ext>
-            </a:extLst>
-          </p:cNvPr>
-          <p:cNvPicPr>
-            <a:picLocks noChangeAspect="1"/>
-          </p:cNvPicPr>
-          <p:nvPr/>
-        </p:nvPicPr>
-        <p:blipFill>
-          <a:blip r:embed="rId6"/>
-          <a:stretch>
-            <a:fillRect/>
-          </a:stretch>
-        </p:blipFill>
-        <p:spPr>
-          <a:xfrm>
-            <a:off x="4511427" y="2413099"/>
-            <a:ext cx="215801" cy="215801"/>
-          </a:xfrm>
-          <a:prstGeom prst="rect">
-            <a:avLst/>
-          </a:prstGeom>
-        </p:spPr>
-      </p:pic>
-      <p:sp>
-        <p:nvSpPr>
-          <p:cNvPr id="18" name="Text 11"/>
-          <p:cNvSpPr/>
-          <p:nvPr/>
-        </p:nvSpPr>
-        <p:spPr>
-          <a:xfrm>
-            <a:off x="4924127" y="2406700"/>
-            <a:ext cx="451467" cy="228600"/>
-          </a:xfrm>
-          <a:prstGeom prst="rect">
-            <a:avLst/>
-          </a:prstGeom>
-          <a:noFill/>
-          <a:ln/>
-        </p:spPr>
-        <p:txBody>
-          <a:bodyPr wrap="square" lIns="0" tIns="0" rIns="0" bIns="0" rtlCol="0" anchor="t"/>
-          <a:lstStyle/>
-          <a:p>
-            <a:pPr algn="l" indent="0" marL="0">
-              <a:lnSpc>
-                <a:spcPts val="1800"/>
-              </a:lnSpc>
-              <a:buNone/>
-            </a:pPr>
-            <a:r>
-              <a:rPr lang="en-US" sz="1650" b="1" dirty="0">
-                <a:solidFill>
-                  <a:srgbClr val="1F2328"/>
-                </a:solidFill>
-                <a:latin typeface="Arial" pitchFamily="34" charset="0"/>
-                <a:ea typeface="Arial" pitchFamily="34" charset="-122"/>
-                <a:cs typeface="Arial" pitchFamily="34" charset="-120"/>
-              </a:rPr>
-              <a:t>Plan</a:t>
-            </a:r>
-            <a:endParaRPr lang="en-US" sz="1650" dirty="0"/>
-          </a:p>
-        </p:txBody>
-      </p:sp>
-      <p:sp>
-        <p:nvSpPr>
-          <p:cNvPr id="19" name="Text 12"/>
-          <p:cNvSpPr/>
-          <p:nvPr/>
-        </p:nvSpPr>
-        <p:spPr>
-          <a:xfrm>
-            <a:off x="4428827" y="2736800"/>
-            <a:ext cx="4177969" cy="214610"/>
-          </a:xfrm>
-          <a:prstGeom prst="rect">
-            <a:avLst/>
-          </a:prstGeom>
-          <a:noFill/>
-          <a:ln/>
-        </p:spPr>
-        <p:txBody>
-          <a:bodyPr wrap="square" lIns="0" tIns="0" rIns="0" bIns="0" rtlCol="0" anchor="t"/>
-          <a:lstStyle/>
-          <a:p>
-            <a:pPr algn="l" indent="0" marL="0">
-              <a:lnSpc>
-                <a:spcPts val="1690"/>
-              </a:lnSpc>
-              <a:buNone/>
-            </a:pPr>
-            <a:r>
-              <a:rPr lang="en-US" sz="1400" dirty="0">
-                <a:solidFill>
-                  <a:srgbClr val="59636E"/>
-                </a:solidFill>
-                <a:latin typeface="Arial" pitchFamily="34" charset="0"/>
-                <a:ea typeface="Arial" pitchFamily="34" charset="-122"/>
-                <a:cs typeface="Arial" pitchFamily="34" charset="-120"/>
-              </a:rPr>
-              <a:t>Approve a plan before any change.</a:t>
-            </a:r>
-            <a:endParaRPr lang="en-US" sz="1400" dirty="0"/>
-          </a:p>
-        </p:txBody>
-      </p:sp>
-      <p:sp>
-        <p:nvSpPr>
-          <p:cNvPr id="20" name="Text 13"/>
-          <p:cNvSpPr/>
-          <p:nvPr/>
-        </p:nvSpPr>
-        <p:spPr>
-          <a:xfrm>
-            <a:off x="4317802" y="3194447"/>
-            <a:ext cx="4318099" cy="898773"/>
-          </a:xfrm>
-          <a:prstGeom prst="roundRect">
-            <a:avLst>
-              <a:gd name="adj" fmla="val 14130"/>
-            </a:avLst>
-          </a:prstGeom>
-          <a:solidFill>
-            <a:srgbClr val="FFFFFF"/>
-          </a:solidFill>
-          <a:ln w="9525">
-            <a:solidFill>
-              <a:srgbClr val="8CE7A5"/>
-            </a:solidFill>
-          </a:ln>
-        </p:spPr>
-        <p:txBody>
-          <a:bodyPr wrap="square" rtlCol="0" anchor="ctr"/>
-          <a:lstStyle/>
-          <a:p>
-            <a:pPr indent="0" marL="0">
-              <a:buNone/>
-            </a:pPr>
-            <a:endParaRPr lang="en-US" dirty="0"/>
-          </a:p>
-        </p:txBody>
-      </p:sp>
-      <p:sp>
-        <p:nvSpPr>
-          <p:cNvPr id="21" name="Text 14"/>
-          <p:cNvSpPr/>
-          <p:nvPr/>
-        </p:nvSpPr>
-        <p:spPr>
-          <a:xfrm>
-            <a:off x="4428827" y="3305473"/>
-            <a:ext cx="381000" cy="381000"/>
-          </a:xfrm>
-          <a:prstGeom prst="roundRect">
-            <a:avLst>
-              <a:gd name="adj" fmla="val 23333"/>
-            </a:avLst>
-          </a:prstGeom>
-          <a:solidFill>
-            <a:srgbClr val="DAFBE1"/>
-          </a:solidFill>
-          <a:ln/>
-        </p:spPr>
-        <p:txBody>
-          <a:bodyPr wrap="square" rtlCol="0" anchor="ctr"/>
-          <a:lstStyle/>
-          <a:p>
-            <a:pPr indent="0" marL="0">
-              <a:buNone/>
-            </a:pPr>
-            <a:endParaRPr lang="en-US" dirty="0"/>
-          </a:p>
-        </p:txBody>
-      </p:sp>
-      <p:pic>
-        <p:nvPicPr>
-          <p:cNvPr id="22" name="Image 5" descr="">
-            <a:extLst>
-              <a:ext uri="{C183D7F6-B498-43B3-948B-1728B52AA6E4}">
-                <adec:decorative xmlns:adec="http://schemas.microsoft.com/office/drawing/2017/decorative" val="1"/>
-              </a:ext>
-            </a:extLst>
-          </p:cNvPr>
-          <p:cNvPicPr>
-            <a:picLocks noChangeAspect="1"/>
-          </p:cNvPicPr>
-          <p:nvPr/>
-        </p:nvPicPr>
-        <p:blipFill>
-          <a:blip r:embed="rId7"/>
-          <a:stretch>
-            <a:fillRect/>
-          </a:stretch>
-        </p:blipFill>
-        <p:spPr>
-          <a:xfrm>
-            <a:off x="4511427" y="3388072"/>
-            <a:ext cx="215801" cy="215801"/>
-          </a:xfrm>
-          <a:prstGeom prst="rect">
-            <a:avLst/>
-          </a:prstGeom>
-        </p:spPr>
-      </p:pic>
-      <p:sp>
-        <p:nvSpPr>
-          <p:cNvPr id="23" name="Text 15"/>
-          <p:cNvSpPr/>
-          <p:nvPr/>
-        </p:nvSpPr>
-        <p:spPr>
-          <a:xfrm>
-            <a:off x="4924127" y="3381673"/>
-            <a:ext cx="937849" cy="228600"/>
-          </a:xfrm>
-          <a:prstGeom prst="rect">
-            <a:avLst/>
-          </a:prstGeom>
-          <a:noFill/>
-          <a:ln/>
-        </p:spPr>
-        <p:txBody>
-          <a:bodyPr wrap="square" lIns="0" tIns="0" rIns="0" bIns="0" rtlCol="0" anchor="t"/>
-          <a:lstStyle/>
-          <a:p>
-            <a:pPr algn="l" indent="0" marL="0">
-              <a:lnSpc>
-                <a:spcPts val="1800"/>
-              </a:lnSpc>
-              <a:buNone/>
-            </a:pPr>
-            <a:r>
-              <a:rPr lang="en-US" sz="1650" b="1" dirty="0">
-                <a:solidFill>
-                  <a:srgbClr val="1F2328"/>
-                </a:solidFill>
-                <a:latin typeface="Arial" pitchFamily="34" charset="0"/>
-                <a:ea typeface="Arial" pitchFamily="34" charset="-122"/>
-                <a:cs typeface="Arial" pitchFamily="34" charset="-120"/>
-              </a:rPr>
-              <a:t>Autopilot</a:t>
-            </a:r>
-            <a:endParaRPr lang="en-US" sz="1650" dirty="0"/>
-          </a:p>
-        </p:txBody>
-      </p:sp>
-      <p:sp>
-        <p:nvSpPr>
-          <p:cNvPr id="24" name="Text 16"/>
-          <p:cNvSpPr/>
-          <p:nvPr/>
-        </p:nvSpPr>
-        <p:spPr>
-          <a:xfrm>
-            <a:off x="4428827" y="3711773"/>
-            <a:ext cx="4177969" cy="214610"/>
-          </a:xfrm>
-          <a:prstGeom prst="rect">
-            <a:avLst/>
-          </a:prstGeom>
-          <a:noFill/>
-          <a:ln/>
-        </p:spPr>
-        <p:txBody>
-          <a:bodyPr wrap="square" lIns="0" tIns="0" rIns="0" bIns="0" rtlCol="0" anchor="t"/>
-          <a:lstStyle/>
-          <a:p>
-            <a:pPr algn="l" indent="0" marL="0">
-              <a:lnSpc>
-                <a:spcPts val="1690"/>
-              </a:lnSpc>
-              <a:buNone/>
-            </a:pPr>
-            <a:r>
-              <a:rPr lang="en-US" sz="1400" dirty="0">
-                <a:solidFill>
-                  <a:srgbClr val="59636E"/>
-                </a:solidFill>
-                <a:latin typeface="Arial" pitchFamily="34" charset="0"/>
-                <a:ea typeface="Arial" pitchFamily="34" charset="-122"/>
-                <a:cs typeface="Arial" pitchFamily="34" charset="-120"/>
-              </a:rPr>
-              <a:t>Well-defined tasks, clear outcomes.</a:t>
-            </a:r>
-            <a:endParaRPr lang="en-US" sz="1400" dirty="0"/>
-          </a:p>
-        </p:txBody>
-      </p:sp>
-      <p:sp>
-        <p:nvSpPr>
           <p:cNvPr id="25" name="Text 17"/>
           <p:cNvSpPr/>
           <p:nvPr/>
         </p:nvSpPr>
         <p:spPr>
           <a:xfrm>
-            <a:off x="4317802" y="4169420"/>
-            <a:ext cx="4318099" cy="478631"/>
+            <a:off x="1645920" y="4471416"/>
+            <a:ext cx="5852160" cy="457200"/>
           </a:xfrm>
           <a:prstGeom prst="roundRect">
             <a:avLst>
@@ -6274,8 +5728,8 @@
         </p:blipFill>
         <p:spPr>
           <a:xfrm>
-            <a:off x="4505027" y="4307086"/>
-            <a:ext cx="203150" cy="203150"/>
+            <a:off x="1874520" y="4599432"/>
+            <a:ext cx="201168" cy="201168"/>
           </a:xfrm>
           <a:prstGeom prst="rect">
             <a:avLst/>
@@ -6290,8 +5744,8 @@
         </p:nvSpPr>
         <p:spPr>
           <a:xfrm>
-            <a:off x="4835128" y="4305895"/>
-            <a:ext cx="2853928" cy="205680"/>
+            <a:off x="2203704" y="4590288"/>
+            <a:ext cx="5029200" cy="237744"/>
           </a:xfrm>
           <a:prstGeom prst="rect">
             <a:avLst/>
@@ -6310,7 +5764,7 @@
               <a:buNone/>
             </a:pPr>
             <a:r>
-              <a:rPr lang="en-US" sz="1350" b="1" dirty="0">
+              <a:rPr lang="en-US" sz="1450" b="1" dirty="0">
                 <a:solidFill>
                   <a:srgbClr val="1F2328"/>
                 </a:solidFill>
@@ -6327,7 +5781,7 @@
               <a:buNone/>
             </a:pPr>
             <a:r>
-              <a:rPr lang="en-US" sz="1350" dirty="0">
+              <a:rPr lang="en-US" sz="1450" dirty="0">
                 <a:solidFill>
                   <a:srgbClr val="1F2328"/>
                 </a:solidFill>
@@ -6935,11 +6389,11 @@
             </ns1:avLst>
           </ns1:prstGeom>
           <ns1:solidFill>
-            <ns1:srgbClr val="FFF8C5"/>
+            <ns1:srgbClr val="DDF4FF"/>
           </ns1:solidFill>
           <ns1:ln w="9525">
             <ns1:solidFill>
-              <ns1:srgbClr val="E7C85A"/>
+              <ns1:srgbClr val="9CD7FF"/>
             </ns1:solidFill>
           </ns1:ln>
         </ns0:spPr>
@@ -6954,36 +6408,6 @@
           </ns1:p>
         </ns0:txBody>
       </ns0:sp>
-      <ns0:pic>
-        <ns0:nvPicPr>
-          <ns0:cNvPr id="18" name="Image 2" descr="">
-            <ns1:extLst>
-              <ns1:ext uri="{C183D7F6-B498-43B3-948B-1728B52AA6E4}">
-                <ns2:decorative val="1"/>
-              </ns1:ext>
-            </ns1:extLst>
-          </ns0:cNvPr>
-          <ns0:cNvPicPr>
-            <ns1:picLocks noChangeAspect="1"/>
-          </ns0:cNvPicPr>
-          <ns0:nvPr/>
-        </ns0:nvPicPr>
-        <ns0:blipFill>
-          <ns1:blip ns3:embed="rId4"/>
-          <ns1:stretch>
-            <ns1:fillRect/>
-          </ns1:stretch>
-        </ns0:blipFill>
-        <ns0:spPr>
-          <ns1:xfrm>
-            <ns1:off x="695176" y="3529459"/>
-            <ns1:ext cx="203150" cy="203150"/>
-          </ns1:xfrm>
-          <ns1:prstGeom prst="rect">
-            <ns1:avLst/>
-          </ns1:prstGeom>
-        </ns0:spPr>
-      </ns0:pic>
       <ns0:sp>
         <ns0:nvSpPr>
           <ns0:cNvPr id="19" name="Text 14"/>
@@ -6992,8 +6416,8 @@
         </ns0:nvSpPr>
         <ns0:spPr>
           <ns1:xfrm>
-            <ns1:off x="1025277" y="3407569"/>
-            <ns1:ext cx="3167557" cy="447080"/>
+            <ns1:off x="694944" y="3429000"/>
+            <ns1:ext cx="3401568" cy="448056"/>
           </ns1:xfrm>
           <ns1:prstGeom prst="rect">
             <ns1:avLst/>
@@ -7005,23 +6429,6 @@
           <ns1:bodyPr wrap="square" lIns="0" tIns="0" rIns="0" bIns="0" rtlCol="0" anchor="t"/>
           <ns1:lstStyle/>
           <ns1:p>
-            <ns1:pPr algn="l" indent="0" marL="0">
-              <ns1:lnSpc>
-                <ns1:spcPts val="1760"/>
-              </ns1:lnSpc>
-              <ns1:buNone/>
-            </ns1:pPr>
-            <ns1:r>
-              <ns1:rPr lang="en-US" sz="1450" b="1" dirty="0">
-                <ns1:solidFill>
-                  <ns1:srgbClr val="1F2328"/>
-                </ns1:solidFill>
-                <ns1:latin typeface="Arial" pitchFamily="34" charset="0"/>
-                <ns1:ea typeface="Arial" pitchFamily="34" charset="-122"/>
-                <ns1:cs typeface="Arial" pitchFamily="34" charset="-120"/>
-              </ns1:rPr>
-              <ns1:t>Fusion effort levels: Standard, High, Max.</ns1:t>
-            </ns1:r>
             <ns1:pPr algn="l" indent="0" marL="0">
               <ns1:lnSpc>
                 <ns1:spcPts val="1760"/>
@@ -7040,6 +6447,23 @@
               </ns1:lnSpc>
               <ns1:buNone/>
             </ns1:pPr>
+            <ns1:pPr algn="l" indent="0" marL="0">
+              <ns1:lnSpc>
+                <ns1:spcPts val="1760"/>
+              </ns1:lnSpc>
+              <ns1:buNone/>
+            </ns1:pPr>
+            <ns1:r>
+              <ns1:rPr lang="en-US" sz="1450" b="0" dirty="0">
+                <ns1:solidFill>
+                  <ns1:srgbClr val="1F2328"/>
+                </ns1:solidFill>
+                <ns1:latin typeface="Arial" pitchFamily="34" charset="0"/>
+                <ns1:ea typeface="Arial" pitchFamily="34" charset="-122"/>
+                <ns1:cs typeface="Arial" pitchFamily="34" charset="-120"/>
+              </ns1:rPr>
+              <ns1:t>Copilot Fusion: Standard, High, Max.</ns1:t>
+            </ns1:r>
             <ns1:endParaRPr lang="en-US" sz="1450" dirty="0"/>
           </ns1:p>
         </ns0:txBody>
@@ -12057,8 +11481,8 @@
         </p:nvSpPr>
         <p:spPr>
           <a:xfrm>
-            <a:off x="511076" y="1463576"/>
-            <a:ext cx="4057650" cy="2736800"/>
+            <a:off x="2091690" y="1234440"/>
+            <a:ext cx="4960620" cy="3337560"/>
           </a:xfrm>
           <a:prstGeom prst="roundRect">
             <a:avLst>
@@ -12108,8 +11532,8 @@
         </p:blipFill>
         <p:spPr>
           <a:xfrm>
-            <a:off x="558701" y="1511201"/>
-            <a:ext cx="3962400" cy="2641550"/>
+            <a:off x="2137410" y="1280160"/>
+            <a:ext cx="4869180" cy="3246120"/>
           </a:xfrm>
           <a:prstGeom prst="rect">
             <a:avLst/>
@@ -12118,151 +11542,14 @@
       </p:pic>
       <p:sp>
         <p:nvSpPr>
-          <p:cNvPr id="10" name="Text 5"/>
-          <p:cNvSpPr/>
-          <p:nvPr/>
-        </p:nvSpPr>
-        <p:spPr>
-          <a:xfrm>
-            <a:off x="4825752" y="1432173"/>
-            <a:ext cx="3810149" cy="724942"/>
-          </a:xfrm>
-          <a:prstGeom prst="roundRect">
-            <a:avLst>
-              <a:gd name="adj" fmla="val 17519"/>
-            </a:avLst>
-          </a:prstGeom>
-          <a:solidFill>
-            <a:srgbClr val="FFFFFF"/>
-          </a:solidFill>
-          <a:ln w="9525">
-            <a:solidFill>
-              <a:srgbClr val="9CD7FF"/>
-            </a:solidFill>
-          </a:ln>
-        </p:spPr>
-        <p:txBody>
-          <a:bodyPr wrap="square" rtlCol="0" anchor="ctr"/>
-          <a:lstStyle/>
-          <a:p>
-            <a:pPr indent="0" marL="0">
-              <a:buNone/>
-            </a:pPr>
-            <a:endParaRPr lang="en-US" dirty="0"/>
-          </a:p>
-        </p:txBody>
-      </p:sp>
-      <p:sp>
-        <p:nvSpPr>
-          <p:cNvPr id="11" name="Text 6"/>
-          <p:cNvSpPr/>
-          <p:nvPr/>
-        </p:nvSpPr>
-        <p:spPr>
-          <a:xfrm>
-            <a:off x="4987677" y="1604070"/>
-            <a:ext cx="381000" cy="381000"/>
-          </a:xfrm>
-          <a:prstGeom prst="roundRect">
-            <a:avLst>
-              <a:gd name="adj" fmla="val 23333"/>
-            </a:avLst>
-          </a:prstGeom>
-          <a:solidFill>
-            <a:srgbClr val="DDF4FF"/>
-          </a:solidFill>
-          <a:ln/>
-        </p:spPr>
-        <p:txBody>
-          <a:bodyPr wrap="square" rtlCol="0" anchor="ctr"/>
-          <a:lstStyle/>
-          <a:p>
-            <a:pPr indent="0" marL="0">
-              <a:buNone/>
-            </a:pPr>
-            <a:endParaRPr lang="en-US" dirty="0"/>
-          </a:p>
-        </p:txBody>
-      </p:sp>
-      <p:pic>
-        <p:nvPicPr>
-          <p:cNvPr id="12" name="Image 3" descr="">
-            <a:extLst>
-              <a:ext uri="{C183D7F6-B498-43B3-948B-1728B52AA6E4}">
-                <adec:decorative xmlns:adec="http://schemas.microsoft.com/office/drawing/2017/decorative" val="1"/>
-              </a:ext>
-            </a:extLst>
-          </p:cNvPr>
-          <p:cNvPicPr>
-            <a:picLocks noChangeAspect="1"/>
-          </p:cNvPicPr>
-          <p:nvPr/>
-        </p:nvPicPr>
-        <p:blipFill>
-          <a:blip r:embed="rId5"/>
-          <a:stretch>
-            <a:fillRect/>
-          </a:stretch>
-        </p:blipFill>
-        <p:spPr>
-          <a:xfrm>
-            <a:off x="5070277" y="1686669"/>
-            <a:ext cx="215801" cy="215801"/>
-          </a:xfrm>
-          <a:prstGeom prst="rect">
-            <a:avLst/>
-          </a:prstGeom>
-        </p:spPr>
-      </p:pic>
-      <p:sp>
-        <p:nvSpPr>
-          <p:cNvPr id="13" name="Text 7"/>
-          <p:cNvSpPr/>
-          <p:nvPr/>
-        </p:nvSpPr>
-        <p:spPr>
-          <a:xfrm>
-            <a:off x="5521077" y="1568648"/>
-            <a:ext cx="2518440" cy="228600"/>
-          </a:xfrm>
-          <a:prstGeom prst="rect">
-            <a:avLst/>
-          </a:prstGeom>
-          <a:noFill/>
-          <a:ln/>
-        </p:spPr>
-        <p:txBody>
-          <a:bodyPr wrap="square" lIns="0" tIns="0" rIns="0" bIns="0" rtlCol="0" anchor="t"/>
-          <a:lstStyle/>
-          <a:p>
-            <a:pPr algn="l" indent="0" marL="0">
-              <a:buNone/>
-            </a:pPr>
-            <a:r>
-              <a:rPr lang="en-US" sz="1550" b="1" dirty="0">
-                <a:solidFill>
-                  <a:srgbClr val="1F2328"/>
-                </a:solidFill>
-                <a:latin typeface="Arial" pitchFamily="34" charset="0"/>
-                <a:ea typeface="Arial" pitchFamily="34" charset="-122"/>
-                <a:cs typeface="Arial" pitchFamily="34" charset="-120"/>
-              </a:rPr>
-              <a:t>Stay in your editor</a:t>
-            </a:r>
-            <a:endParaRPr lang="en-US" sz="1550" dirty="0"/>
-          </a:p>
-        </p:txBody>
-      </p:sp>
-      <p:sp>
-        <p:nvSpPr>
-          <p:cNvPr id="14" name="Text 8"/>
-          <p:cNvSpPr/>
-          <p:nvPr/>
-        </p:nvSpPr>
-        <p:spPr>
-          <a:xfrm>
-            <a:off x="5521077" y="1822549"/>
-            <a:ext cx="2518440" cy="198090"/>
+          <p:cNvPr id="24" name="Text 16"/>
+          <p:cNvSpPr/>
+          <p:nvPr/>
+        </p:nvSpPr>
+        <p:spPr>
+          <a:xfrm>
+            <a:off x="1280160" y="4690872"/>
+            <a:ext cx="6583680" cy="256032"/>
           </a:xfrm>
           <a:prstGeom prst="rect">
             <a:avLst/>
@@ -12281,365 +11568,7 @@
               <a:buNone/>
             </a:pPr>
             <a:r>
-              <a:rPr lang="en-US" sz="1350" dirty="0">
-                <a:solidFill>
-                  <a:srgbClr val="59636E"/>
-                </a:solidFill>
-                <a:latin typeface="Arial" pitchFamily="34" charset="0"/>
-                <a:ea typeface="Arial" pitchFamily="34" charset="-122"/>
-                <a:cs typeface="Arial" pitchFamily="34" charset="-120"/>
-              </a:rPr>
-              <a:t>For deep editing and debugging.</a:t>
-            </a:r>
-            <a:endParaRPr lang="en-US" sz="1350" dirty="0"/>
-          </a:p>
-        </p:txBody>
-      </p:sp>
-      <p:sp>
-        <p:nvSpPr>
-          <p:cNvPr id="15" name="Text 9"/>
-          <p:cNvSpPr/>
-          <p:nvPr/>
-        </p:nvSpPr>
-        <p:spPr>
-          <a:xfrm>
-            <a:off x="4825752" y="2334816"/>
-            <a:ext cx="3810149" cy="923032"/>
-          </a:xfrm>
-          <a:prstGeom prst="roundRect">
-            <a:avLst>
-              <a:gd name="adj" fmla="val 13759"/>
-            </a:avLst>
-          </a:prstGeom>
-          <a:solidFill>
-            <a:srgbClr val="FFFFFF"/>
-          </a:solidFill>
-          <a:ln w="9525">
-            <a:solidFill>
-              <a:srgbClr val="E0C5FF"/>
-            </a:solidFill>
-          </a:ln>
-        </p:spPr>
-        <p:txBody>
-          <a:bodyPr wrap="square" rtlCol="0" anchor="ctr"/>
-          <a:lstStyle/>
-          <a:p>
-            <a:pPr indent="0" marL="0">
-              <a:buNone/>
-            </a:pPr>
-            <a:endParaRPr lang="en-US" dirty="0"/>
-          </a:p>
-        </p:txBody>
-      </p:sp>
-      <p:sp>
-        <p:nvSpPr>
-          <p:cNvPr id="16" name="Text 10"/>
-          <p:cNvSpPr/>
-          <p:nvPr/>
-        </p:nvSpPr>
-        <p:spPr>
-          <a:xfrm>
-            <a:off x="4987677" y="2605832"/>
-            <a:ext cx="381000" cy="381000"/>
-          </a:xfrm>
-          <a:prstGeom prst="roundRect">
-            <a:avLst>
-              <a:gd name="adj" fmla="val 23333"/>
-            </a:avLst>
-          </a:prstGeom>
-          <a:solidFill>
-            <a:srgbClr val="FBEFFF"/>
-          </a:solidFill>
-          <a:ln/>
-        </p:spPr>
-        <p:txBody>
-          <a:bodyPr wrap="square" rtlCol="0" anchor="ctr"/>
-          <a:lstStyle/>
-          <a:p>
-            <a:pPr indent="0" marL="0">
-              <a:buNone/>
-            </a:pPr>
-            <a:endParaRPr lang="en-US" dirty="0"/>
-          </a:p>
-        </p:txBody>
-      </p:sp>
-      <p:pic>
-        <p:nvPicPr>
-          <p:cNvPr id="17" name="Image 4" descr="">
-            <a:extLst>
-              <a:ext uri="{C183D7F6-B498-43B3-948B-1728B52AA6E4}">
-                <adec:decorative xmlns:adec="http://schemas.microsoft.com/office/drawing/2017/decorative" val="1"/>
-              </a:ext>
-            </a:extLst>
-          </p:cNvPr>
-          <p:cNvPicPr>
-            <a:picLocks noChangeAspect="1"/>
-          </p:cNvPicPr>
-          <p:nvPr/>
-        </p:nvPicPr>
-        <p:blipFill>
-          <a:blip r:embed="rId6"/>
-          <a:stretch>
-            <a:fillRect/>
-          </a:stretch>
-        </p:blipFill>
-        <p:spPr>
-          <a:xfrm>
-            <a:off x="5070277" y="2688431"/>
-            <a:ext cx="215801" cy="215801"/>
-          </a:xfrm>
-          <a:prstGeom prst="rect">
-            <a:avLst/>
-          </a:prstGeom>
-        </p:spPr>
-      </p:pic>
-      <p:sp>
-        <p:nvSpPr>
-          <p:cNvPr id="18" name="Text 11"/>
-          <p:cNvSpPr/>
-          <p:nvPr/>
-        </p:nvSpPr>
-        <p:spPr>
-          <a:xfrm>
-            <a:off x="5521077" y="2471291"/>
-            <a:ext cx="3011957" cy="228600"/>
-          </a:xfrm>
-          <a:prstGeom prst="rect">
-            <a:avLst/>
-          </a:prstGeom>
-          <a:noFill/>
-          <a:ln/>
-        </p:spPr>
-        <p:txBody>
-          <a:bodyPr wrap="square" lIns="0" tIns="0" rIns="0" bIns="0" rtlCol="0" anchor="t"/>
-          <a:lstStyle/>
-          <a:p>
-            <a:pPr algn="l" indent="0" marL="0">
-              <a:buNone/>
-            </a:pPr>
-            <a:r>
-              <a:rPr lang="en-US" sz="1550" b="1" dirty="0">
-                <a:solidFill>
-                  <a:srgbClr val="1F2328"/>
-                </a:solidFill>
-                <a:latin typeface="Arial" pitchFamily="34" charset="0"/>
-                <a:ea typeface="Arial" pitchFamily="34" charset="-122"/>
-                <a:cs typeface="Arial" pitchFamily="34" charset="-120"/>
-              </a:rPr>
-              <a:t>Open the app to supervise</a:t>
-            </a:r>
-            <a:endParaRPr lang="en-US" sz="1550" dirty="0"/>
-          </a:p>
-        </p:txBody>
-      </p:sp>
-      <p:sp>
-        <p:nvSpPr>
-          <p:cNvPr id="19" name="Text 12"/>
-          <p:cNvSpPr/>
-          <p:nvPr/>
-        </p:nvSpPr>
-        <p:spPr>
-          <a:xfrm>
-            <a:off x="5521077" y="2725192"/>
-            <a:ext cx="3011957" cy="396180"/>
-          </a:xfrm>
-          <a:prstGeom prst="rect">
-            <a:avLst/>
-          </a:prstGeom>
-          <a:noFill/>
-          <a:ln/>
-        </p:spPr>
-        <p:txBody>
-          <a:bodyPr wrap="square" lIns="0" tIns="0" rIns="0" bIns="0" rtlCol="0" anchor="t"/>
-          <a:lstStyle/>
-          <a:p>
-            <a:pPr algn="l" indent="0" marL="0">
-              <a:lnSpc>
-                <a:spcPts val="1560"/>
-              </a:lnSpc>
-              <a:buNone/>
-            </a:pPr>
-            <a:r>
-              <a:rPr lang="en-US" sz="1350" dirty="0">
-                <a:solidFill>
-                  <a:srgbClr val="59636E"/>
-                </a:solidFill>
-                <a:latin typeface="Arial" pitchFamily="34" charset="0"/>
-                <a:ea typeface="Arial" pitchFamily="34" charset="-122"/>
-                <a:cs typeface="Arial" pitchFamily="34" charset="-120"/>
-              </a:rPr>
-              <a:t>Run sessions, review changes, ship PRs.</a:t>
-            </a:r>
-            <a:endParaRPr lang="en-US" sz="1350" dirty="0"/>
-          </a:p>
-        </p:txBody>
-      </p:sp>
-      <p:sp>
-        <p:nvSpPr>
-          <p:cNvPr id="20" name="Text 13"/>
-          <p:cNvSpPr/>
-          <p:nvPr/>
-        </p:nvSpPr>
-        <p:spPr>
-          <a:xfrm>
-            <a:off x="4825752" y="3435548"/>
-            <a:ext cx="3810149" cy="923032"/>
-          </a:xfrm>
-          <a:prstGeom prst="roundRect">
-            <a:avLst>
-              <a:gd name="adj" fmla="val 13759"/>
-            </a:avLst>
-          </a:prstGeom>
-          <a:solidFill>
-            <a:srgbClr val="FFFFFF"/>
-          </a:solidFill>
-          <a:ln w="9525">
-            <a:solidFill>
-              <a:srgbClr val="8CE7A5"/>
-            </a:solidFill>
-          </a:ln>
-        </p:spPr>
-        <p:txBody>
-          <a:bodyPr wrap="square" rtlCol="0" anchor="ctr"/>
-          <a:lstStyle/>
-          <a:p>
-            <a:pPr indent="0" marL="0">
-              <a:buNone/>
-            </a:pPr>
-            <a:endParaRPr lang="en-US" dirty="0"/>
-          </a:p>
-        </p:txBody>
-      </p:sp>
-      <p:sp>
-        <p:nvSpPr>
-          <p:cNvPr id="21" name="Text 14"/>
-          <p:cNvSpPr/>
-          <p:nvPr/>
-        </p:nvSpPr>
-        <p:spPr>
-          <a:xfrm>
-            <a:off x="4987677" y="3706564"/>
-            <a:ext cx="381000" cy="381000"/>
-          </a:xfrm>
-          <a:prstGeom prst="roundRect">
-            <a:avLst>
-              <a:gd name="adj" fmla="val 23333"/>
-            </a:avLst>
-          </a:prstGeom>
-          <a:solidFill>
-            <a:srgbClr val="DAFBE1"/>
-          </a:solidFill>
-          <a:ln/>
-        </p:spPr>
-        <p:txBody>
-          <a:bodyPr wrap="square" rtlCol="0" anchor="ctr"/>
-          <a:lstStyle/>
-          <a:p>
-            <a:pPr indent="0" marL="0">
-              <a:buNone/>
-            </a:pPr>
-            <a:endParaRPr lang="en-US" dirty="0"/>
-          </a:p>
-        </p:txBody>
-      </p:sp>
-      <p:pic>
-        <p:nvPicPr>
-          <p:cNvPr id="22" name="Image 5" descr="">
-            <a:extLst>
-              <a:ext uri="{C183D7F6-B498-43B3-948B-1728B52AA6E4}">
-                <adec:decorative xmlns:adec="http://schemas.microsoft.com/office/drawing/2017/decorative" val="1"/>
-              </a:ext>
-            </a:extLst>
-          </p:cNvPr>
-          <p:cNvPicPr>
-            <a:picLocks noChangeAspect="1"/>
-          </p:cNvPicPr>
-          <p:nvPr/>
-        </p:nvPicPr>
-        <p:blipFill>
-          <a:blip r:embed="rId7"/>
-          <a:stretch>
-            <a:fillRect/>
-          </a:stretch>
-        </p:blipFill>
-        <p:spPr>
-          <a:xfrm>
-            <a:off x="5070277" y="3789164"/>
-            <a:ext cx="215801" cy="215801"/>
-          </a:xfrm>
-          <a:prstGeom prst="rect">
-            <a:avLst/>
-          </a:prstGeom>
-        </p:spPr>
-      </p:pic>
-      <p:sp>
-        <p:nvSpPr>
-          <p:cNvPr id="23" name="Text 15"/>
-          <p:cNvSpPr/>
-          <p:nvPr/>
-        </p:nvSpPr>
-        <p:spPr>
-          <a:xfrm>
-            <a:off x="5521077" y="3572024"/>
-            <a:ext cx="3011957" cy="228600"/>
-          </a:xfrm>
-          <a:prstGeom prst="rect">
-            <a:avLst/>
-          </a:prstGeom>
-          <a:noFill/>
-          <a:ln/>
-        </p:spPr>
-        <p:txBody>
-          <a:bodyPr wrap="square" lIns="0" tIns="0" rIns="0" bIns="0" rtlCol="0" anchor="t"/>
-          <a:lstStyle/>
-          <a:p>
-            <a:pPr algn="l" indent="0" marL="0">
-              <a:buNone/>
-            </a:pPr>
-            <a:r>
-              <a:rPr lang="en-US" sz="1550" b="1" dirty="0">
-                <a:solidFill>
-                  <a:srgbClr val="1F2328"/>
-                </a:solidFill>
-                <a:latin typeface="Arial" pitchFamily="34" charset="0"/>
-                <a:ea typeface="Arial" pitchFamily="34" charset="-122"/>
-                <a:cs typeface="Arial" pitchFamily="34" charset="-120"/>
-              </a:rPr>
-              <a:t>Jump back any time</a:t>
-            </a:r>
-            <a:endParaRPr lang="en-US" sz="1550" dirty="0"/>
-          </a:p>
-        </p:txBody>
-      </p:sp>
-      <p:sp>
-        <p:nvSpPr>
-          <p:cNvPr id="24" name="Text 16"/>
-          <p:cNvSpPr/>
-          <p:nvPr/>
-        </p:nvSpPr>
-        <p:spPr>
-          <a:xfrm>
-            <a:off x="5521077" y="3825925"/>
-            <a:ext cx="3011957" cy="396180"/>
-          </a:xfrm>
-          <a:prstGeom prst="rect">
-            <a:avLst/>
-          </a:prstGeom>
-          <a:noFill/>
-          <a:ln/>
-        </p:spPr>
-        <p:txBody>
-          <a:bodyPr wrap="square" lIns="0" tIns="0" rIns="0" bIns="0" rtlCol="0" anchor="t"/>
-          <a:lstStyle/>
-          <a:p>
-            <a:pPr algn="l" indent="0" marL="0">
-              <a:lnSpc>
-                <a:spcPts val="1560"/>
-              </a:lnSpc>
-              <a:buNone/>
-            </a:pPr>
-            <a:r>
-              <a:rPr lang="en-US" sz="1350" dirty="0">
+              <a:rPr lang="en-US" sz="1450" dirty="0">
                 <a:solidFill>
                   <a:srgbClr val="59636E"/>
                 </a:solidFill>
@@ -14351,8 +13280,8 @@
         </ns0:nvSpPr>
         <ns0:spPr>
           <ns1:xfrm>
-            <ns1:off x="511076" y="1975396"/>
-            <ns1:ext cx="3956000" cy="1642021"/>
+            <ns1:off x="512064" y="1819656"/>
+            <ns1:ext cx="3950208" cy="1653414"/>
           </ns1:xfrm>
           <ns1:prstGeom prst="roundRect">
             <ns1:avLst>
@@ -14388,22 +13317,22 @@
       </ns0:sp>
       <ns0:pic>
         <ns0:nvPicPr>
-          <ns0:cNvPr id="10" name="Image 2" descr="Pull requests view"/>
+          <ns0:cNvPr id="10" name="Image 2" descr="Pull requests with Authored by me selected and the three practice PRs."/>
           <ns0:cNvPicPr>
             <ns1:picLocks noChangeAspect="1"/>
           </ns0:cNvPicPr>
           <ns0:nvPr/>
         </ns0:nvPicPr>
         <ns0:blipFill>
-          <ns1:blip ns3:embed="rId4"/>
+          <ns1:blip ns3:embed="rId10"/>
           <ns1:stretch>
             <ns1:fillRect/>
           </ns1:stretch>
         </ns0:blipFill>
         <ns0:spPr>
           <ns1:xfrm>
-            <ns1:off x="558701" y="2023021"/>
-            <ns1:ext cx="3860750" cy="1546771"/>
+            <ns1:off x="557784" y="1865376"/>
+            <ns1:ext cx="3858768" cy="1561974"/>
           </ns1:xfrm>
           <ns1:prstGeom prst="rect">
             <ns1:avLst/>
@@ -14418,8 +13347,8 @@
         </ns0:nvSpPr>
         <ns0:spPr>
           <ns1:xfrm>
-            <ns1:off x="507950" y="4165402"/>
-            <ns1:ext cx="355550" cy="355550"/>
+            <ns1:off x="512064" y="3849624"/>
+            <ns1:ext cx="356616" cy="356616"/>
           </ns1:xfrm>
           <ns1:prstGeom prst="roundRect">
             <ns1:avLst>
@@ -14464,8 +13393,8 @@
         </ns0:blipFill>
         <ns0:spPr>
           <ns1:xfrm>
-            <ns1:off x="590401" y="4247852"/>
-            <ns1:ext cx="190500" cy="190500"/>
+            <ns1:off x="594360" y="3931920"/>
+            <ns1:ext cx="192024" cy="192024"/>
           </ns1:xfrm>
           <ns1:prstGeom prst="rect">
             <ns1:avLst/>
@@ -14480,8 +13409,8 @@
         </ns0:nvSpPr>
         <ns0:spPr>
           <ns1:xfrm>
-            <ns1:off x="1015901" y="4117181"/>
-            <ns1:ext cx="2487775" cy="228600"/>
+            <ns1:off x="1014984" y="3794760"/>
+            <ns1:ext cx="2743200" cy="246888"/>
           </ns1:xfrm>
           <ns1:prstGeom prst="rect">
             <ns1:avLst/>
@@ -14519,8 +13448,8 @@
         </ns0:nvSpPr>
         <ns0:spPr>
           <ns1:xfrm>
-            <ns1:off x="1015901" y="4371082"/>
-            <ns1:ext cx="2487775" cy="198090"/>
+            <ns1:off x="1014984" y="4078224"/>
+            <ns1:ext cx="2926080" cy="274320"/>
           </ns1:xfrm>
           <ns1:prstGeom prst="rect">
             <ns1:avLst/>
@@ -14595,8 +13524,8 @@
         </ns0:nvSpPr>
         <ns0:spPr>
           <ns1:xfrm>
-            <ns1:off x="4676626" y="2125861"/>
-            <ns1:ext cx="3956000" cy="1341090"/>
+            <ns1:off x="4681728" y="1819656"/>
+            <ns1:ext cx="3950208" cy="1653414"/>
           </ns1:xfrm>
           <ns1:prstGeom prst="roundRect">
             <ns1:avLst>
@@ -14632,22 +13561,22 @@
       </ns0:sp>
       <ns0:pic>
         <ns0:nvPicPr>
-          <ns0:cNvPr id="16" name="Image 4" descr="Issues view"/>
+          <ns0:cNvPr id="16" name="Image 4" descr="Issues with Assigned to me selected and practice issue rows."/>
           <ns0:cNvPicPr>
             <ns1:picLocks noChangeAspect="1"/>
           </ns0:cNvPicPr>
           <ns0:nvPr/>
         </ns0:nvPicPr>
         <ns0:blipFill>
-          <ns1:blip ns3:embed="rId6"/>
+          <ns1:blip ns3:embed="rId11"/>
           <ns1:stretch>
             <ns1:fillRect/>
           </ns1:stretch>
         </ns0:blipFill>
         <ns0:spPr>
           <ns1:xfrm>
-            <ns1:off x="4724251" y="2173486"/>
-            <ns1:ext cx="3860750" cy="1245840"/>
+            <ns1:off x="4727448" y="1865376"/>
+            <ns1:ext cx="3858768" cy="1561974"/>
           </ns1:xfrm>
           <ns1:prstGeom prst="rect">
             <ns1:avLst/>
@@ -14662,8 +13591,8 @@
         </ns0:nvSpPr>
         <ns0:spPr>
           <ns1:xfrm>
-            <ns1:off x="4673501" y="4165402"/>
-            <ns1:ext cx="355550" cy="355550"/>
+            <ns1:off x="4672584" y="3849624"/>
+            <ns1:ext cx="356616" cy="356616"/>
           </ns1:xfrm>
           <ns1:prstGeom prst="roundRect">
             <ns1:avLst>
@@ -14708,8 +13637,8 @@
         </ns0:blipFill>
         <ns0:spPr>
           <ns1:xfrm>
-            <ns1:off x="4755952" y="4247852"/>
-            <ns1:ext cx="190500" cy="190500"/>
+            <ns1:off x="4754880" y="3931920"/>
+            <ns1:ext cx="192024" cy="192024"/>
           </ns1:xfrm>
           <ns1:prstGeom prst="rect">
             <ns1:avLst/>
@@ -14724,8 +13653,8 @@
         </ns0:nvSpPr>
         <ns0:spPr>
           <ns1:xfrm>
-            <ns1:off x="5181451" y="4117181"/>
-            <ns1:ext cx="2624096" cy="228600"/>
+            <ns1:off x="5184648" y="3794760"/>
+            <ns1:ext cx="2743200" cy="246888"/>
           </ns1:xfrm>
           <ns1:prstGeom prst="rect">
             <ns1:avLst/>
@@ -14763,8 +13692,8 @@
         </ns0:nvSpPr>
         <ns0:spPr>
           <ns1:xfrm>
-            <ns1:off x="5181451" y="4371082"/>
-            <ns1:ext cx="2624096" cy="198090"/>
+            <ns1:off x="5184648" y="4078224"/>
+            <ns1:ext cx="2926080" cy="274320"/>
           </ns1:xfrm>
           <ns1:prstGeom prst="rect">
             <ns1:avLst/>
